--- a/temporal_fractions/temporal_fractions.pptx
+++ b/temporal_fractions/temporal_fractions.pptx
@@ -6,6 +6,7 @@
   </p:sldMasterIdLst>
   <p:sldIdLst>
     <p:sldId id="256" r:id="rId2"/>
+    <p:sldId id="257" r:id="rId3"/>
   </p:sldIdLst>
   <p:sldSz cx="12192000" cy="6858000"/>
   <p:notesSz cx="6858000" cy="9144000"/>
@@ -259,7 +260,7 @@
           <a:p>
             <a:fld id="{2225F40E-4D6A-4DF5-98D1-C5D2D280A6AC}" type="datetimeFigureOut">
               <a:rPr lang="en-US" smtClean="0"/>
-              <a:t>6/6/2025</a:t>
+              <a:t>8/13/2025</a:t>
             </a:fld>
             <a:endParaRPr lang="en-US"/>
           </a:p>
@@ -457,7 +458,7 @@
           <a:p>
             <a:fld id="{2225F40E-4D6A-4DF5-98D1-C5D2D280A6AC}" type="datetimeFigureOut">
               <a:rPr lang="en-US" smtClean="0"/>
-              <a:t>6/6/2025</a:t>
+              <a:t>8/13/2025</a:t>
             </a:fld>
             <a:endParaRPr lang="en-US"/>
           </a:p>
@@ -665,7 +666,7 @@
           <a:p>
             <a:fld id="{2225F40E-4D6A-4DF5-98D1-C5D2D280A6AC}" type="datetimeFigureOut">
               <a:rPr lang="en-US" smtClean="0"/>
-              <a:t>6/6/2025</a:t>
+              <a:t>8/13/2025</a:t>
             </a:fld>
             <a:endParaRPr lang="en-US"/>
           </a:p>
@@ -863,7 +864,7 @@
           <a:p>
             <a:fld id="{2225F40E-4D6A-4DF5-98D1-C5D2D280A6AC}" type="datetimeFigureOut">
               <a:rPr lang="en-US" smtClean="0"/>
-              <a:t>6/6/2025</a:t>
+              <a:t>8/13/2025</a:t>
             </a:fld>
             <a:endParaRPr lang="en-US"/>
           </a:p>
@@ -1138,7 +1139,7 @@
           <a:p>
             <a:fld id="{2225F40E-4D6A-4DF5-98D1-C5D2D280A6AC}" type="datetimeFigureOut">
               <a:rPr lang="en-US" smtClean="0"/>
-              <a:t>6/6/2025</a:t>
+              <a:t>8/13/2025</a:t>
             </a:fld>
             <a:endParaRPr lang="en-US"/>
           </a:p>
@@ -1403,7 +1404,7 @@
           <a:p>
             <a:fld id="{2225F40E-4D6A-4DF5-98D1-C5D2D280A6AC}" type="datetimeFigureOut">
               <a:rPr lang="en-US" smtClean="0"/>
-              <a:t>6/6/2025</a:t>
+              <a:t>8/13/2025</a:t>
             </a:fld>
             <a:endParaRPr lang="en-US"/>
           </a:p>
@@ -1815,7 +1816,7 @@
           <a:p>
             <a:fld id="{2225F40E-4D6A-4DF5-98D1-C5D2D280A6AC}" type="datetimeFigureOut">
               <a:rPr lang="en-US" smtClean="0"/>
-              <a:t>6/6/2025</a:t>
+              <a:t>8/13/2025</a:t>
             </a:fld>
             <a:endParaRPr lang="en-US"/>
           </a:p>
@@ -1956,7 +1957,7 @@
           <a:p>
             <a:fld id="{2225F40E-4D6A-4DF5-98D1-C5D2D280A6AC}" type="datetimeFigureOut">
               <a:rPr lang="en-US" smtClean="0"/>
-              <a:t>6/6/2025</a:t>
+              <a:t>8/13/2025</a:t>
             </a:fld>
             <a:endParaRPr lang="en-US"/>
           </a:p>
@@ -2069,7 +2070,7 @@
           <a:p>
             <a:fld id="{2225F40E-4D6A-4DF5-98D1-C5D2D280A6AC}" type="datetimeFigureOut">
               <a:rPr lang="en-US" smtClean="0"/>
-              <a:t>6/6/2025</a:t>
+              <a:t>8/13/2025</a:t>
             </a:fld>
             <a:endParaRPr lang="en-US"/>
           </a:p>
@@ -2380,7 +2381,7 @@
           <a:p>
             <a:fld id="{2225F40E-4D6A-4DF5-98D1-C5D2D280A6AC}" type="datetimeFigureOut">
               <a:rPr lang="en-US" smtClean="0"/>
-              <a:t>6/6/2025</a:t>
+              <a:t>8/13/2025</a:t>
             </a:fld>
             <a:endParaRPr lang="en-US"/>
           </a:p>
@@ -2668,7 +2669,7 @@
           <a:p>
             <a:fld id="{2225F40E-4D6A-4DF5-98D1-C5D2D280A6AC}" type="datetimeFigureOut">
               <a:rPr lang="en-US" smtClean="0"/>
-              <a:t>6/6/2025</a:t>
+              <a:t>8/13/2025</a:t>
             </a:fld>
             <a:endParaRPr lang="en-US"/>
           </a:p>
@@ -2909,7 +2910,7 @@
           <a:p>
             <a:fld id="{2225F40E-4D6A-4DF5-98D1-C5D2D280A6AC}" type="datetimeFigureOut">
               <a:rPr lang="en-US" smtClean="0"/>
-              <a:t>6/6/2025</a:t>
+              <a:t>8/13/2025</a:t>
             </a:fld>
             <a:endParaRPr lang="en-US"/>
           </a:p>
@@ -3589,6 +3590,381 @@
 </p:sld>
 </file>
 
+<file path=ppt/slides/slide2.xml><?xml version="1.0" encoding="utf-8"?>
+<p:sld xmlns:a="http://schemas.openxmlformats.org/drawingml/2006/main" xmlns:r="http://schemas.openxmlformats.org/officeDocument/2006/relationships" xmlns:p="http://schemas.openxmlformats.org/presentationml/2006/main">
+  <p:cSld>
+    <p:spTree>
+      <p:nvGrpSpPr>
+        <p:cNvPr id="1" name=""/>
+        <p:cNvGrpSpPr/>
+        <p:nvPr/>
+      </p:nvGrpSpPr>
+      <p:grpSpPr>
+        <a:xfrm>
+          <a:off x="0" y="0"/>
+          <a:ext cx="0" cy="0"/>
+          <a:chOff x="0" y="0"/>
+          <a:chExt cx="0" cy="0"/>
+        </a:xfrm>
+      </p:grpSpPr>
+      <p:grpSp>
+        <p:nvGrpSpPr>
+          <p:cNvPr id="6" name="Group 5">
+            <a:extLst>
+              <a:ext uri="{FF2B5EF4-FFF2-40B4-BE49-F238E27FC236}">
+                <a16:creationId xmlns:a16="http://schemas.microsoft.com/office/drawing/2014/main" id="{61A9E48F-CAFC-347D-9F4A-B9065B6A7361}"/>
+              </a:ext>
+            </a:extLst>
+          </p:cNvPr>
+          <p:cNvGrpSpPr/>
+          <p:nvPr/>
+        </p:nvGrpSpPr>
+        <p:grpSpPr>
+          <a:xfrm>
+            <a:off x="1536700" y="1250950"/>
+            <a:ext cx="8953500" cy="3828097"/>
+            <a:chOff x="1536700" y="1250950"/>
+            <a:chExt cx="8953500" cy="3828097"/>
+          </a:xfrm>
+        </p:grpSpPr>
+        <p:sp>
+          <p:nvSpPr>
+            <p:cNvPr id="16" name="Rectangle 15">
+              <a:extLst>
+                <a:ext uri="{FF2B5EF4-FFF2-40B4-BE49-F238E27FC236}">
+                  <a16:creationId xmlns:a16="http://schemas.microsoft.com/office/drawing/2014/main" id="{AEA93E2D-0BA8-6052-B76B-B1C4C051790F}"/>
+                </a:ext>
+              </a:extLst>
+            </p:cNvPr>
+            <p:cNvSpPr/>
+            <p:nvPr/>
+          </p:nvSpPr>
+          <p:spPr>
+            <a:xfrm>
+              <a:off x="1536700" y="1250950"/>
+              <a:ext cx="8953500" cy="3828097"/>
+            </a:xfrm>
+            <a:prstGeom prst="rect">
+              <a:avLst/>
+            </a:prstGeom>
+            <a:solidFill>
+              <a:schemeClr val="bg1"/>
+            </a:solidFill>
+            <a:ln>
+              <a:solidFill>
+                <a:schemeClr val="bg1"/>
+              </a:solidFill>
+            </a:ln>
+          </p:spPr>
+          <p:style>
+            <a:lnRef idx="2">
+              <a:schemeClr val="accent1">
+                <a:shade val="15000"/>
+              </a:schemeClr>
+            </a:lnRef>
+            <a:fillRef idx="1">
+              <a:schemeClr val="accent1"/>
+            </a:fillRef>
+            <a:effectRef idx="0">
+              <a:schemeClr val="accent1"/>
+            </a:effectRef>
+            <a:fontRef idx="minor">
+              <a:schemeClr val="lt1"/>
+            </a:fontRef>
+          </p:style>
+          <p:txBody>
+            <a:bodyPr rtlCol="0" anchor="ctr"/>
+            <a:lstStyle/>
+            <a:p>
+              <a:pPr algn="ctr"/>
+              <a:endParaRPr lang="en-US"/>
+            </a:p>
+          </p:txBody>
+        </p:sp>
+        <p:pic>
+          <p:nvPicPr>
+            <p:cNvPr id="21" name="Picture 20">
+              <a:extLst>
+                <a:ext uri="{FF2B5EF4-FFF2-40B4-BE49-F238E27FC236}">
+                  <a16:creationId xmlns:a16="http://schemas.microsoft.com/office/drawing/2014/main" id="{AC994898-1583-ABE0-EE82-E0C3492524A2}"/>
+                </a:ext>
+              </a:extLst>
+            </p:cNvPr>
+            <p:cNvPicPr>
+              <a:picLocks noChangeAspect="1"/>
+            </p:cNvPicPr>
+            <p:nvPr/>
+          </p:nvPicPr>
+          <p:blipFill>
+            <a:blip r:embed="rId2">
+              <a:extLst>
+                <a:ext uri="{28A0092B-C50C-407E-A947-70E740481C1C}">
+                  <a14:useLocalDpi xmlns:a14="http://schemas.microsoft.com/office/drawing/2010/main" val="0"/>
+                </a:ext>
+              </a:extLst>
+            </a:blip>
+            <a:srcRect t="2245" r="32252" b="2642"/>
+            <a:stretch/>
+          </p:blipFill>
+          <p:spPr>
+            <a:xfrm>
+              <a:off x="6717742" y="1600196"/>
+              <a:ext cx="3716929" cy="3478851"/>
+            </a:xfrm>
+            <a:prstGeom prst="rect">
+              <a:avLst/>
+            </a:prstGeom>
+          </p:spPr>
+        </p:pic>
+        <p:pic>
+          <p:nvPicPr>
+            <p:cNvPr id="10" name="Picture 9">
+              <a:extLst>
+                <a:ext uri="{FF2B5EF4-FFF2-40B4-BE49-F238E27FC236}">
+                  <a16:creationId xmlns:a16="http://schemas.microsoft.com/office/drawing/2014/main" id="{B1E96B70-5C8E-6AEF-E6AB-6C68B3134417}"/>
+                </a:ext>
+              </a:extLst>
+            </p:cNvPr>
+            <p:cNvPicPr>
+              <a:picLocks noChangeAspect="1"/>
+            </p:cNvPicPr>
+            <p:nvPr/>
+          </p:nvPicPr>
+          <p:blipFill>
+            <a:blip r:embed="rId3">
+              <a:extLst>
+                <a:ext uri="{28A0092B-C50C-407E-A947-70E740481C1C}">
+                  <a14:useLocalDpi xmlns:a14="http://schemas.microsoft.com/office/drawing/2010/main" val="0"/>
+                </a:ext>
+              </a:extLst>
+            </a:blip>
+            <a:srcRect l="68210" t="6895" r="2103" b="70578"/>
+            <a:stretch/>
+          </p:blipFill>
+          <p:spPr>
+            <a:xfrm>
+              <a:off x="8756650" y="1753990"/>
+              <a:ext cx="1628775" cy="823913"/>
+            </a:xfrm>
+            <a:prstGeom prst="rect">
+              <a:avLst/>
+            </a:prstGeom>
+          </p:spPr>
+        </p:pic>
+        <p:sp>
+          <p:nvSpPr>
+            <p:cNvPr id="13" name="TextBox 12">
+              <a:extLst>
+                <a:ext uri="{FF2B5EF4-FFF2-40B4-BE49-F238E27FC236}">
+                  <a16:creationId xmlns:a16="http://schemas.microsoft.com/office/drawing/2014/main" id="{D9B894E8-B62B-286C-CD29-7F8D08BB3740}"/>
+                </a:ext>
+              </a:extLst>
+            </p:cNvPr>
+            <p:cNvSpPr txBox="1"/>
+            <p:nvPr/>
+          </p:nvSpPr>
+          <p:spPr>
+            <a:xfrm>
+              <a:off x="7272159" y="1312961"/>
+              <a:ext cx="449162" cy="369332"/>
+            </a:xfrm>
+            <a:prstGeom prst="rect">
+              <a:avLst/>
+            </a:prstGeom>
+            <a:noFill/>
+          </p:spPr>
+          <p:txBody>
+            <a:bodyPr wrap="none" rtlCol="0">
+              <a:spAutoFit/>
+            </a:bodyPr>
+            <a:lstStyle/>
+            <a:p>
+              <a:r>
+                <a:rPr lang="en-US" dirty="0"/>
+                <a:t>(b)</a:t>
+              </a:r>
+            </a:p>
+          </p:txBody>
+        </p:sp>
+        <p:pic>
+          <p:nvPicPr>
+            <p:cNvPr id="23" name="Picture 22">
+              <a:extLst>
+                <a:ext uri="{FF2B5EF4-FFF2-40B4-BE49-F238E27FC236}">
+                  <a16:creationId xmlns:a16="http://schemas.microsoft.com/office/drawing/2014/main" id="{032606DA-B8E3-09AF-4E27-B31D49551BA9}"/>
+                </a:ext>
+              </a:extLst>
+            </p:cNvPr>
+            <p:cNvPicPr>
+              <a:picLocks noChangeAspect="1"/>
+            </p:cNvPicPr>
+            <p:nvPr/>
+          </p:nvPicPr>
+          <p:blipFill>
+            <a:blip r:embed="rId4">
+              <a:extLst>
+                <a:ext uri="{28A0092B-C50C-407E-A947-70E740481C1C}">
+                  <a14:useLocalDpi xmlns:a14="http://schemas.microsoft.com/office/drawing/2010/main" val="0"/>
+                </a:ext>
+              </a:extLst>
+            </a:blip>
+            <a:srcRect r="2219"/>
+            <a:stretch/>
+          </p:blipFill>
+          <p:spPr>
+            <a:xfrm>
+              <a:off x="1616598" y="1601110"/>
+              <a:ext cx="5101144" cy="3477937"/>
+            </a:xfrm>
+            <a:prstGeom prst="rect">
+              <a:avLst/>
+            </a:prstGeom>
+          </p:spPr>
+        </p:pic>
+        <p:sp>
+          <p:nvSpPr>
+            <p:cNvPr id="12" name="TextBox 11">
+              <a:extLst>
+                <a:ext uri="{FF2B5EF4-FFF2-40B4-BE49-F238E27FC236}">
+                  <a16:creationId xmlns:a16="http://schemas.microsoft.com/office/drawing/2014/main" id="{1B7418B9-0029-E2D9-1E47-6EEDACBBE4F5}"/>
+                </a:ext>
+              </a:extLst>
+            </p:cNvPr>
+            <p:cNvSpPr txBox="1"/>
+            <p:nvPr/>
+          </p:nvSpPr>
+          <p:spPr>
+            <a:xfrm>
+              <a:off x="1914500" y="1312961"/>
+              <a:ext cx="442172" cy="369332"/>
+            </a:xfrm>
+            <a:prstGeom prst="rect">
+              <a:avLst/>
+            </a:prstGeom>
+            <a:noFill/>
+          </p:spPr>
+          <p:txBody>
+            <a:bodyPr wrap="none" rtlCol="0">
+              <a:spAutoFit/>
+            </a:bodyPr>
+            <a:lstStyle/>
+            <a:p>
+              <a:r>
+                <a:rPr lang="en-US" dirty="0"/>
+                <a:t>(a)</a:t>
+              </a:r>
+            </a:p>
+          </p:txBody>
+        </p:sp>
+        <p:pic>
+          <p:nvPicPr>
+            <p:cNvPr id="2" name="Picture 1">
+              <a:extLst>
+                <a:ext uri="{FF2B5EF4-FFF2-40B4-BE49-F238E27FC236}">
+                  <a16:creationId xmlns:a16="http://schemas.microsoft.com/office/drawing/2014/main" id="{BF1240FB-CD23-AA86-C9B4-755B7AE50FCC}"/>
+                </a:ext>
+              </a:extLst>
+            </p:cNvPr>
+            <p:cNvPicPr>
+              <a:picLocks noChangeAspect="1"/>
+            </p:cNvPicPr>
+            <p:nvPr/>
+          </p:nvPicPr>
+          <p:blipFill>
+            <a:blip r:embed="rId4">
+              <a:extLst>
+                <a:ext uri="{28A0092B-C50C-407E-A947-70E740481C1C}">
+                  <a14:useLocalDpi xmlns:a14="http://schemas.microsoft.com/office/drawing/2010/main" val="0"/>
+                </a:ext>
+              </a:extLst>
+            </a:blip>
+            <a:srcRect l="71024" t="8341" r="2999" b="82484"/>
+            <a:stretch/>
+          </p:blipFill>
+          <p:spPr>
+            <a:xfrm>
+              <a:off x="5322626" y="2577903"/>
+              <a:ext cx="1355167" cy="319119"/>
+            </a:xfrm>
+            <a:prstGeom prst="rect">
+              <a:avLst/>
+            </a:prstGeom>
+          </p:spPr>
+        </p:pic>
+        <p:pic>
+          <p:nvPicPr>
+            <p:cNvPr id="4" name="Picture 3">
+              <a:extLst>
+                <a:ext uri="{FF2B5EF4-FFF2-40B4-BE49-F238E27FC236}">
+                  <a16:creationId xmlns:a16="http://schemas.microsoft.com/office/drawing/2014/main" id="{13BE1E25-84C9-6836-F72F-A3292D706AEE}"/>
+                </a:ext>
+              </a:extLst>
+            </p:cNvPr>
+            <p:cNvPicPr>
+              <a:picLocks noChangeAspect="1"/>
+            </p:cNvPicPr>
+            <p:nvPr/>
+          </p:nvPicPr>
+          <p:blipFill>
+            <a:blip r:embed="rId5"/>
+            <a:stretch>
+              <a:fillRect/>
+            </a:stretch>
+          </p:blipFill>
+          <p:spPr>
+            <a:xfrm rot="5400000">
+              <a:off x="5616063" y="2556175"/>
+              <a:ext cx="125248" cy="179791"/>
+            </a:xfrm>
+            <a:prstGeom prst="rect">
+              <a:avLst/>
+            </a:prstGeom>
+          </p:spPr>
+        </p:pic>
+        <p:pic>
+          <p:nvPicPr>
+            <p:cNvPr id="5" name="Picture 4">
+              <a:extLst>
+                <a:ext uri="{FF2B5EF4-FFF2-40B4-BE49-F238E27FC236}">
+                  <a16:creationId xmlns:a16="http://schemas.microsoft.com/office/drawing/2014/main" id="{A79075C5-73F9-87CB-115C-AB6A78E85297}"/>
+                </a:ext>
+              </a:extLst>
+            </p:cNvPr>
+            <p:cNvPicPr>
+              <a:picLocks noChangeAspect="1"/>
+            </p:cNvPicPr>
+            <p:nvPr/>
+          </p:nvPicPr>
+          <p:blipFill>
+            <a:blip r:embed="rId5"/>
+            <a:stretch>
+              <a:fillRect/>
+            </a:stretch>
+          </p:blipFill>
+          <p:spPr>
+            <a:xfrm rot="5400000">
+              <a:off x="5616064" y="2730928"/>
+              <a:ext cx="125247" cy="179790"/>
+            </a:xfrm>
+            <a:prstGeom prst="rect">
+              <a:avLst/>
+            </a:prstGeom>
+          </p:spPr>
+        </p:pic>
+      </p:grpSp>
+    </p:spTree>
+    <p:extLst>
+      <p:ext uri="{BB962C8B-B14F-4D97-AF65-F5344CB8AC3E}">
+        <p14:creationId xmlns:p14="http://schemas.microsoft.com/office/powerpoint/2010/main" val="942565929"/>
+      </p:ext>
+    </p:extLst>
+  </p:cSld>
+  <p:clrMapOvr>
+    <a:masterClrMapping/>
+  </p:clrMapOvr>
+</p:sld>
+</file>
+
 <file path=ppt/theme/theme1.xml><?xml version="1.0" encoding="utf-8"?>
 <a:theme xmlns:a="http://schemas.openxmlformats.org/drawingml/2006/main" name="Office Theme">
   <a:themeElements>
